--- a/assets/pptx/catalog-158.pptx
+++ b/assets/pptx/catalog-158.pptx
@@ -3286,7 +3286,7 @@
                 <a:ea typeface="Ebrima"/>
                 <a:cs typeface="Ebrima"/>
               </a:rPr>
-              <a:t>የተቆረጠውን የቀጠለልኝ ጌታ አይደለም ዎይ?! (2x)</a:t>
+              <a:t>የተቆረጠውን የቀጠለልኝ ጌታ አይደለም ዎይ?! 2x</a:t>
             </a:r>
           </a:p>
         </p:txBody>
@@ -3371,7 +3371,7 @@
                 <a:ea typeface="Ebrima"/>
                 <a:cs typeface="Ebrima"/>
               </a:rPr>
-              <a:t>ተሸከመኝ ተሸከመኝ ተሸከመኝ (3x)</a:t>
+              <a:t>ተሸከመኝ ተሸከመኝ ተሸከመኝ 3x</a:t>
             </a:r>
           </a:p>
         </p:txBody>
@@ -3528,7 +3528,7 @@
                 <a:ea typeface="Ebrima"/>
                 <a:cs typeface="Ebrima"/>
               </a:rPr>
-              <a:t>አብሮኝ አለ ቤቴ ባይመቸውም (2x)</a:t>
+              <a:t>አብሮኝ አለ ቤቴ ባይመቸውም 2x</a:t>
             </a:r>
           </a:p>
         </p:txBody>
@@ -3631,7 +3631,7 @@
                 <a:ea typeface="Ebrima"/>
                 <a:cs typeface="Ebrima"/>
               </a:rPr>
-              <a:t>እርሱማ ሰለቸኝ ወዲያ አላለኝ (2x)</a:t>
+              <a:t>እርሱማ ሰለቸኝ ወዲያ አላለኝ 2x</a:t>
             </a:r>
           </a:p>
         </p:txBody>
@@ -3734,7 +3734,7 @@
                 <a:ea typeface="Ebrima"/>
                 <a:cs typeface="Ebrima"/>
               </a:rPr>
-              <a:t>ከ'ነማንነቴ የወደደኝ ጌታ አይደለም ዎይ?! (2x)</a:t>
+              <a:t>ከ'ነማንነቴ የወደደኝ ጌታ አይደለም ዎይ?! 2x</a:t>
             </a:r>
           </a:p>
         </p:txBody>
@@ -3801,7 +3801,7 @@
                 <a:ea typeface="Ebrima"/>
                 <a:cs typeface="Ebrima"/>
               </a:rPr>
-              <a:t>እያባበለኝ (3x)</a:t>
+              <a:t>እያባበለኝ 3x</a:t>
             </a:r>
           </a:p>
           <a:p>
@@ -3819,7 +3819,7 @@
                 <a:ea typeface="Ebrima"/>
                 <a:cs typeface="Ebrima"/>
               </a:rPr>
-              <a:t>ተሸከመኝ (3x)</a:t>
+              <a:t>ተሸከመኝ 3x</a:t>
             </a:r>
           </a:p>
         </p:txBody>
@@ -3958,7 +3958,7 @@
                 <a:ea typeface="Ebrima"/>
                 <a:cs typeface="Ebrima"/>
               </a:rPr>
-              <a:t>ፍቅር ማለት ምን እንደሆነ አወ'ኩኝ (2x)</a:t>
+              <a:t>ፍቅር ማለት ምን እንደሆነ አወ'ኩኝ 2x</a:t>
             </a:r>
           </a:p>
         </p:txBody>
@@ -4025,7 +4025,7 @@
                 <a:ea typeface="Ebrima"/>
                 <a:cs typeface="Ebrima"/>
               </a:rPr>
-              <a:t>እያባበለኝ (3x)</a:t>
+              <a:t>እያባበለኝ 3x</a:t>
             </a:r>
           </a:p>
           <a:p>
@@ -4043,7 +4043,7 @@
                 <a:ea typeface="Ebrima"/>
                 <a:cs typeface="Ebrima"/>
               </a:rPr>
-              <a:t>ተሸከመኝ (3x)</a:t>
+              <a:t>ተሸከመኝ 3x</a:t>
             </a:r>
           </a:p>
         </p:txBody>
@@ -4164,7 +4164,7 @@
                 <a:ea typeface="Ebrima"/>
                 <a:cs typeface="Ebrima"/>
               </a:rPr>
-              <a:t>አብሮኝ አለ ቤቴ ባይመቸውም (2x)</a:t>
+              <a:t>አብሮኝ አለ ቤቴ ባይመቸውም 2x</a:t>
             </a:r>
           </a:p>
         </p:txBody>
@@ -4267,7 +4267,7 @@
                 <a:ea typeface="Ebrima"/>
                 <a:cs typeface="Ebrima"/>
               </a:rPr>
-              <a:t>እርሱማ ሰለቸኝ ወዲያ አላለኝ (2x)</a:t>
+              <a:t>እርሱማ ሰለቸኝ ወዲያ አላለኝ 2x</a:t>
             </a:r>
           </a:p>
         </p:txBody>
